--- a/Planning docs/Slides/lesson-8-2-teacher-slides.pptx
+++ b/Planning docs/Slides/lesson-8-2-teacher-slides.pptx
@@ -4701,7 +4701,7 @@
                 <a:ea typeface="Calibri" pitchFamily="34" charset="-122"/>
                 <a:cs typeface="Calibri" pitchFamily="34" charset="-120"/>
               </a:rPr>
-              <a:t>•  What details does the author use to show Despereaux is different?</a:t>
+              <a:t>•  Despereaux sees stained-glass light and discovers words in a book. Why doesn’t he eat the book like Merlot wants?</a:t>
             </a:r>
             <a:endParaRPr lang="en-US" sz="1500" dirty="0"/>
           </a:p>
@@ -4718,24 +4718,7 @@
                 <a:ea typeface="Calibri" pitchFamily="34" charset="-122"/>
                 <a:cs typeface="Calibri" pitchFamily="34" charset="-120"/>
               </a:rPr>
-              <a:t>•  How do his siblings react when he does not act like a normal mouse?</a:t>
-            </a:r>
-            <a:endParaRPr lang="en-US" sz="1500" dirty="0"/>
-          </a:p>
-          <a:p>
-            <a:pPr indent="0" marL="0">
-              <a:buNone/>
-            </a:pPr>
-            <a:r>
-              <a:rPr lang="en-US" sz="1500" dirty="0">
-                <a:solidFill>
-                  <a:srgbClr val="1E293B"/>
-                </a:solidFill>
-                <a:latin typeface="Calibri" pitchFamily="34" charset="0"/>
-                <a:ea typeface="Calibri" pitchFamily="34" charset="-122"/>
-                <a:cs typeface="Calibri" pitchFamily="34" charset="-120"/>
-              </a:rPr>
-              <a:t>•  What new thing does Despereaux discover in these chapters?</a:t>
+              <a:t>•  Despereaux hears the king playing music and steps out of the wall. Why is this so dangerous for a mouse?</a:t>
             </a:r>
             <a:endParaRPr lang="en-US" sz="1500" dirty="0"/>
           </a:p>
